--- a/STP/presentations/Session_3/training options.pptx
+++ b/STP/presentations/Session_3/training options.pptx
@@ -668,7 +668,7 @@
           <a:p>
             <a:fld id="{779B1DDD-8229-2C4E-8910-A0E8F8BF9E17}" type="datetimeFigureOut">
               <a:rPr lang="en-IT" smtClean="0"/>
-              <a:t>28/11/25</a:t>
+              <a:t>12/02/2025</a:t>
             </a:fld>
             <a:endParaRPr lang="en-IT"/>
           </a:p>
@@ -1085,7 +1085,7 @@
           <a:p>
             <a:fld id="{F8A8B291-23C9-4CE5-96D0-E0118EB6230C}" type="datetimeFigureOut">
               <a:rPr lang="en-GB" smtClean="0"/>
-              <a:t>28/11/2025</a:t>
+              <a:t>02/12/2025</a:t>
             </a:fld>
             <a:endParaRPr lang="en-GB"/>
           </a:p>
@@ -1285,7 +1285,7 @@
           <a:p>
             <a:fld id="{F8A8B291-23C9-4CE5-96D0-E0118EB6230C}" type="datetimeFigureOut">
               <a:rPr lang="en-GB" smtClean="0"/>
-              <a:t>28/11/2025</a:t>
+              <a:t>02/12/2025</a:t>
             </a:fld>
             <a:endParaRPr lang="en-GB"/>
           </a:p>
@@ -1495,7 +1495,7 @@
           <a:p>
             <a:fld id="{F8A8B291-23C9-4CE5-96D0-E0118EB6230C}" type="datetimeFigureOut">
               <a:rPr lang="en-GB" smtClean="0"/>
-              <a:t>28/11/2025</a:t>
+              <a:t>02/12/2025</a:t>
             </a:fld>
             <a:endParaRPr lang="en-GB"/>
           </a:p>
@@ -1695,7 +1695,7 @@
           <a:p>
             <a:fld id="{F8A8B291-23C9-4CE5-96D0-E0118EB6230C}" type="datetimeFigureOut">
               <a:rPr lang="en-GB" smtClean="0"/>
-              <a:t>28/11/2025</a:t>
+              <a:t>02/12/2025</a:t>
             </a:fld>
             <a:endParaRPr lang="en-GB"/>
           </a:p>
@@ -1971,7 +1971,7 @@
           <a:p>
             <a:fld id="{F8A8B291-23C9-4CE5-96D0-E0118EB6230C}" type="datetimeFigureOut">
               <a:rPr lang="en-GB" smtClean="0"/>
-              <a:t>28/11/2025</a:t>
+              <a:t>02/12/2025</a:t>
             </a:fld>
             <a:endParaRPr lang="en-GB"/>
           </a:p>
@@ -2239,7 +2239,7 @@
           <a:p>
             <a:fld id="{F8A8B291-23C9-4CE5-96D0-E0118EB6230C}" type="datetimeFigureOut">
               <a:rPr lang="en-GB" smtClean="0"/>
-              <a:t>28/11/2025</a:t>
+              <a:t>02/12/2025</a:t>
             </a:fld>
             <a:endParaRPr lang="en-GB"/>
           </a:p>
@@ -2654,7 +2654,7 @@
           <a:p>
             <a:fld id="{F8A8B291-23C9-4CE5-96D0-E0118EB6230C}" type="datetimeFigureOut">
               <a:rPr lang="en-GB" smtClean="0"/>
-              <a:t>28/11/2025</a:t>
+              <a:t>02/12/2025</a:t>
             </a:fld>
             <a:endParaRPr lang="en-GB"/>
           </a:p>
@@ -2796,7 +2796,7 @@
           <a:p>
             <a:fld id="{F8A8B291-23C9-4CE5-96D0-E0118EB6230C}" type="datetimeFigureOut">
               <a:rPr lang="en-GB" smtClean="0"/>
-              <a:t>28/11/2025</a:t>
+              <a:t>02/12/2025</a:t>
             </a:fld>
             <a:endParaRPr lang="en-GB"/>
           </a:p>
@@ -2909,7 +2909,7 @@
           <a:p>
             <a:fld id="{F8A8B291-23C9-4CE5-96D0-E0118EB6230C}" type="datetimeFigureOut">
               <a:rPr lang="en-GB" smtClean="0"/>
-              <a:t>28/11/2025</a:t>
+              <a:t>02/12/2025</a:t>
             </a:fld>
             <a:endParaRPr lang="en-GB"/>
           </a:p>
@@ -3222,7 +3222,7 @@
           <a:p>
             <a:fld id="{F8A8B291-23C9-4CE5-96D0-E0118EB6230C}" type="datetimeFigureOut">
               <a:rPr lang="en-GB" smtClean="0"/>
-              <a:t>28/11/2025</a:t>
+              <a:t>02/12/2025</a:t>
             </a:fld>
             <a:endParaRPr lang="en-GB"/>
           </a:p>
@@ -3511,7 +3511,7 @@
           <a:p>
             <a:fld id="{F8A8B291-23C9-4CE5-96D0-E0118EB6230C}" type="datetimeFigureOut">
               <a:rPr lang="en-GB" smtClean="0"/>
-              <a:t>28/11/2025</a:t>
+              <a:t>02/12/2025</a:t>
             </a:fld>
             <a:endParaRPr lang="en-GB"/>
           </a:p>
@@ -3754,7 +3754,7 @@
           <a:p>
             <a:fld id="{F8A8B291-23C9-4CE5-96D0-E0118EB6230C}" type="datetimeFigureOut">
               <a:rPr lang="en-GB" smtClean="0"/>
-              <a:t>28/11/2025</a:t>
+              <a:t>02/12/2025</a:t>
             </a:fld>
             <a:endParaRPr lang="en-GB"/>
           </a:p>
@@ -4958,7 +4958,7 @@
         </p:nvGraphicFramePr>
         <p:xfrm>
           <a:off x="479443" y="1444681"/>
-          <a:ext cx="11233113" cy="5048194"/>
+          <a:ext cx="11233113" cy="5214488"/>
         </p:xfrm>
         <a:graphic>
           <a:graphicData uri="http://schemas.openxmlformats.org/drawingml/2006/table">
@@ -5077,13 +5077,18 @@
                         <a:buNone/>
                       </a:pPr>
                       <a:r>
-                        <a:rPr lang="en-GB" sz="1400" dirty="0">
+                        <a:rPr lang="pt-BR" sz="1400" dirty="0">
                           <a:solidFill>
                             <a:schemeClr val="tx1"/>
                           </a:solidFill>
                         </a:rPr>
-                        <a:t>Climate Science for Climate Action</a:t>
+                        <a:t>Ciência do Clima para a Ação Climática</a:t>
                       </a:r>
+                      <a:endParaRPr lang="en-GB" sz="1400" dirty="0">
+                        <a:solidFill>
+                          <a:schemeClr val="tx1"/>
+                        </a:solidFill>
+                      </a:endParaRPr>
                     </a:p>
                   </a:txBody>
                   <a:tcPr anchor="ctr"/>
@@ -5097,9 +5102,10 @@
                         <a:buNone/>
                       </a:pPr>
                       <a:r>
-                        <a:rPr lang="en-GB" sz="1400" dirty="0"/>
-                        <a:t>Provide an overview of the key information needed to produce climate risk assessments and study the impact of climate change</a:t>
+                        <a:rPr lang="pt-BR" sz="1400" dirty="0"/>
+                        <a:t>Forneça uma visão geral das principais informações necessárias para produzir avaliações de risco climático e estudar o impacto das mudanças climáticas</a:t>
                       </a:r>
+                      <a:endParaRPr lang="en-GB" sz="1400" dirty="0"/>
                     </a:p>
                   </a:txBody>
                   <a:tcPr anchor="ctr"/>
@@ -5113,9 +5119,10 @@
                         <a:buNone/>
                       </a:pPr>
                       <a:r>
-                        <a:rPr lang="en-GB" sz="1400" dirty="0"/>
-                        <a:t>key climate and ocean datasets, basic risk assessment concepts. Mostly theoretical</a:t>
+                        <a:rPr lang="pt-BR" sz="1400" dirty="0"/>
+                        <a:t>Conjuntos de dados chave sobre clima e oceano, conceitos básicos de avaliação de risco. Principalmente teórico</a:t>
                       </a:r>
+                      <a:endParaRPr lang="en-GB" sz="1400" dirty="0"/>
                     </a:p>
                   </a:txBody>
                   <a:tcPr anchor="ctr"/>
@@ -5129,9 +5136,10 @@
                         <a:buNone/>
                       </a:pPr>
                       <a:r>
-                        <a:rPr lang="en-GB" sz="1400"/>
-                        <a:t>Ministry staff, fisheries &amp; agriculture services, NGOs, FAO</a:t>
+                        <a:rPr lang="pt-BR" sz="1400" dirty="0"/>
+                        <a:t>Funcionários do ministério, serviços de pesca e agricultura, ONGs, FAO</a:t>
                       </a:r>
+                      <a:endParaRPr lang="en-GB" sz="1400" dirty="0"/>
                     </a:p>
                   </a:txBody>
                   <a:tcPr anchor="ctr"/>
@@ -5152,20 +5160,12 @@
                         <a:buNone/>
                       </a:pPr>
                       <a:r>
-                        <a:rPr lang="en-GB" sz="1400" dirty="0">
+                        <a:rPr lang="pt-BR" sz="1400" dirty="0">
                           <a:solidFill>
                             <a:srgbClr val="FF0000"/>
                           </a:solidFill>
                         </a:rPr>
-                        <a:t>Hands-on Training on tools for Climate and Sectoral </a:t>
-                      </a:r>
-                      <a:r>
-                        <a:rPr lang="en-GB" sz="1400">
-                          <a:solidFill>
-                            <a:srgbClr val="FF0000"/>
-                          </a:solidFill>
-                        </a:rPr>
-                        <a:t>Risk Assessments</a:t>
+                        <a:t>Treinamento prático sobre ferramentas para Avaliações de Risco Climático e Setorial</a:t>
                       </a:r>
                       <a:endParaRPr lang="en-GB" sz="1400" dirty="0">
                         <a:solidFill>
@@ -5185,9 +5185,10 @@
                         <a:buNone/>
                       </a:pPr>
                       <a:r>
-                        <a:rPr lang="en-GB" sz="1400" dirty="0"/>
-                        <a:t>Build practical skills to run, visualise and interpret climate risk analyses for crops and fisheries using a wide set of tools.</a:t>
+                        <a:rPr lang="pt-BR" sz="1400" dirty="0"/>
+                        <a:t>Desenvolva habilidades práticas para conduzir, visualizar e interpretar análises de risco climático para culturas e pescarias usando um amplo conjunto de ferramentas.</a:t>
                       </a:r>
+                      <a:endParaRPr lang="en-GB" sz="1400" dirty="0"/>
                     </a:p>
                   </a:txBody>
                   <a:tcPr anchor="ctr"/>
@@ -5202,8 +5203,21 @@
                       </a:pPr>
                       <a:r>
                         <a:rPr lang="en-GB" sz="1400" dirty="0"/>
-                        <a:t>CAVA platform (web/R/Python), basic analytics workflow</a:t>
+                        <a:t>CAVA </a:t>
                       </a:r>
+                      <a:r>
+                        <a:rPr lang="en-GB" sz="1400" dirty="0" err="1"/>
+                        <a:t>plataforma</a:t>
+                      </a:r>
+                      <a:r>
+                        <a:rPr lang="en-GB" sz="1400" dirty="0"/>
+                        <a:t> (web/R/Python), </a:t>
+                      </a:r>
+                      <a:r>
+                        <a:rPr lang="pt-BR" sz="1400" dirty="0"/>
+                        <a:t>Fluxo de trabalho básico de análise</a:t>
+                      </a:r>
+                      <a:endParaRPr lang="en-GB" sz="1400" dirty="0"/>
                     </a:p>
                   </a:txBody>
                   <a:tcPr anchor="ctr"/>
@@ -5217,9 +5231,10 @@
                         <a:buNone/>
                       </a:pPr>
                       <a:r>
-                        <a:rPr lang="en-GB" sz="1400" dirty="0"/>
-                        <a:t>Technical staff from ministries, research institutes</a:t>
+                        <a:rPr lang="pt-BR" sz="1400" dirty="0"/>
+                        <a:t>Equipe técnica de ministérios e institutos de pesquisa</a:t>
                       </a:r>
+                      <a:endParaRPr lang="en-GB" sz="1400" dirty="0"/>
                     </a:p>
                   </a:txBody>
                   <a:tcPr anchor="ctr"/>
@@ -5240,9 +5255,10 @@
                         <a:buNone/>
                       </a:pPr>
                       <a:r>
-                        <a:rPr lang="en-GB" sz="1400"/>
-                        <a:t>Applying Crop Models and Climate Information for Climate-Smart Agricultural Planning</a:t>
+                        <a:rPr lang="pt-BR" sz="1400" dirty="0"/>
+                        <a:t>Aplicação de Modelos de Culturas e Informações Climáticas para Planejamento Agrícola Inteligente em Relação ao Clima</a:t>
                       </a:r>
+                      <a:endParaRPr lang="en-GB" sz="1400" dirty="0"/>
                     </a:p>
                   </a:txBody>
                   <a:tcPr anchor="ctr"/>
@@ -5256,9 +5272,10 @@
                         <a:buNone/>
                       </a:pPr>
                       <a:r>
-                        <a:rPr lang="en-GB" sz="1400"/>
-                        <a:t>Translate model outputs into practical climate actions (e.g. sowing date, irrigation timing/frequency, variety choice).</a:t>
+                        <a:rPr lang="pt-BR" sz="1400" dirty="0"/>
+                        <a:t>Traduza os resultados do modelo em ações climáticas práticas (por exemplo, data de semeadura, tempo/frequência de irrigação, escolha de variedade).</a:t>
                       </a:r>
+                      <a:endParaRPr lang="en-GB" sz="1400" dirty="0"/>
                     </a:p>
                   </a:txBody>
                   <a:tcPr anchor="ctr"/>
@@ -5277,8 +5294,29 @@
                       </a:r>
                       <a:r>
                         <a:rPr lang="en-GB" sz="1400" dirty="0"/>
-                        <a:t> results, CAVA outputs, climate indicators, agronomic decision rules</a:t>
+                        <a:t> </a:t>
                       </a:r>
+                      <a:r>
+                        <a:rPr lang="en-GB" sz="1400" dirty="0" err="1"/>
+                        <a:t>Resultados</a:t>
+                      </a:r>
+                      <a:r>
+                        <a:rPr lang="en-GB" sz="1400" dirty="0"/>
+                        <a:t>, CAVA </a:t>
+                      </a:r>
+                      <a:r>
+                        <a:rPr lang="en-GB" sz="1400" dirty="0" err="1"/>
+                        <a:t>Saídas</a:t>
+                      </a:r>
+                      <a:r>
+                        <a:rPr lang="en-GB" sz="1400" dirty="0"/>
+                        <a:t>, </a:t>
+                      </a:r>
+                      <a:r>
+                        <a:rPr lang="pt-BR" sz="1400" dirty="0"/>
+                        <a:t>Indicadores climáticos, regras de decisão agronômica</a:t>
+                      </a:r>
+                      <a:endParaRPr lang="en-GB" sz="1400" dirty="0"/>
                     </a:p>
                   </a:txBody>
                   <a:tcPr anchor="ctr"/>
@@ -5292,9 +5330,10 @@
                         <a:buNone/>
                       </a:pPr>
                       <a:r>
-                        <a:rPr lang="en-GB" sz="1400" dirty="0"/>
-                        <a:t>Technical planners, extension officers, project designers</a:t>
+                        <a:rPr lang="pt-BR" sz="1400" dirty="0"/>
+                        <a:t>Planejadores técnicos, oficiais de extensão, projetistas de projetos</a:t>
                       </a:r>
+                      <a:endParaRPr lang="en-GB" sz="1400" dirty="0"/>
                     </a:p>
                   </a:txBody>
                   <a:tcPr anchor="ctr"/>
@@ -5315,13 +5354,18 @@
                         <a:buNone/>
                       </a:pPr>
                       <a:r>
-                        <a:rPr lang="en-GB" sz="1400" dirty="0">
+                        <a:rPr lang="pt-BR" sz="1400" dirty="0">
                           <a:solidFill>
                             <a:srgbClr val="FF0000"/>
                           </a:solidFill>
                         </a:rPr>
-                        <a:t>Climate Impact Modelling and Risk Assessment for Fisheries and the Blue Economy</a:t>
+                        <a:t>Modelagem de Impacto Climático e Avaliação de Riscos para Pescas e a Economia Azul</a:t>
                       </a:r>
+                      <a:endParaRPr lang="en-GB" sz="1400" dirty="0">
+                        <a:solidFill>
+                          <a:srgbClr val="FF0000"/>
+                        </a:solidFill>
+                      </a:endParaRPr>
                     </a:p>
                   </a:txBody>
                   <a:tcPr anchor="ctr"/>
@@ -5335,9 +5379,10 @@
                         <a:buNone/>
                       </a:pPr>
                       <a:r>
-                        <a:rPr lang="en-GB" sz="1400"/>
-                        <a:t>Enhance capacities to assess climate impacts on fish stocks and fisheries-dependent livelihoods and to explore adaptation options.</a:t>
+                        <a:rPr lang="pt-BR" sz="1400" dirty="0"/>
+                        <a:t>Ampliar as capacidades para avaliar impactos climáticos sobre estoques de peixes e meios de subsistência dependentes da pesca, além de explorar opções de adaptação.</a:t>
                       </a:r>
+                      <a:endParaRPr lang="en-GB" sz="1400" dirty="0"/>
                     </a:p>
                   </a:txBody>
                   <a:tcPr anchor="ctr"/>
@@ -5351,9 +5396,10 @@
                         <a:buNone/>
                       </a:pPr>
                       <a:r>
-                        <a:rPr lang="en-GB" sz="1400" dirty="0"/>
-                        <a:t>Ocean/climate indicators, Species Distribution Modelling, Impact modelling</a:t>
+                        <a:rPr lang="pt-BR" sz="1400" dirty="0"/>
+                        <a:t>Indicadores de oceano/clima, Modelagem de Distribuição de Espécies, Modelagem de Impacto</a:t>
                       </a:r>
+                      <a:endParaRPr lang="en-GB" sz="1400" dirty="0"/>
                     </a:p>
                   </a:txBody>
                   <a:tcPr anchor="ctr"/>
@@ -5367,9 +5413,10 @@
                         <a:buNone/>
                       </a:pPr>
                       <a:r>
-                        <a:rPr lang="en-GB" sz="1400" dirty="0"/>
-                        <a:t>Fisheries department staff, Blue Economy units, marine researchers, FAO</a:t>
+                        <a:rPr lang="pt-BR" sz="1400" dirty="0"/>
+                        <a:t>Equipe do departamento de pesca, unidades da Economia Azul, pesquisadores marinhos, FAO</a:t>
                       </a:r>
+                      <a:endParaRPr lang="en-GB" sz="1400" dirty="0"/>
                     </a:p>
                   </a:txBody>
                   <a:tcPr anchor="ctr"/>
@@ -6463,15 +6510,6 @@
 </file>
 
 <file path=customXml/item1.xml><?xml version="1.0" encoding="utf-8"?>
-<?mso-contentType ?>
-<FormTemplates xmlns="http://schemas.microsoft.com/sharepoint/v3/contenttype/forms">
-  <Display>DocumentLibraryForm</Display>
-  <Edit>DocumentLibraryForm</Edit>
-  <New>DocumentLibraryForm</New>
-</FormTemplates>
-</file>
-
-<file path=customXml/item2.xml><?xml version="1.0" encoding="utf-8"?>
 <p:properties xmlns:p="http://schemas.microsoft.com/office/2006/metadata/properties" xmlns:xsi="http://www.w3.org/2001/XMLSchema-instance" xmlns:pc="http://schemas.microsoft.com/office/infopath/2007/PartnerControls">
   <documentManagement>
     <lcf76f155ced4ddcb4097134ff3c332f xmlns="c0caafef-fd22-48d0-85dc-526f5aa604f6">
@@ -6480,6 +6518,15 @@
     <TaxCatchAll xmlns="cc7ce8ca-8f52-44ec-9496-3c41d0f5ad18" xsi:nil="true"/>
   </documentManagement>
 </p:properties>
+</file>
+
+<file path=customXml/item2.xml><?xml version="1.0" encoding="utf-8"?>
+<?mso-contentType ?>
+<FormTemplates xmlns="http://schemas.microsoft.com/sharepoint/v3/contenttype/forms">
+  <Display>DocumentLibraryForm</Display>
+  <Edit>DocumentLibraryForm</Edit>
+  <New>DocumentLibraryForm</New>
+</FormTemplates>
 </file>
 
 <file path=customXml/item3.xml><?xml version="1.0" encoding="utf-8"?>
@@ -6732,20 +6779,20 @@
 </file>
 
 <file path=customXml/itemProps1.xml><?xml version="1.0" encoding="utf-8"?>
-<ds:datastoreItem xmlns:ds="http://schemas.openxmlformats.org/officeDocument/2006/customXml" ds:itemID="{3A3DF9AB-00FC-46DB-A5D6-293E8DE99346}">
-  <ds:schemaRefs>
-    <ds:schemaRef ds:uri="http://schemas.microsoft.com/sharepoint/v3/contenttype/forms"/>
-  </ds:schemaRefs>
-</ds:datastoreItem>
-</file>
-
-<file path=customXml/itemProps2.xml><?xml version="1.0" encoding="utf-8"?>
 <ds:datastoreItem xmlns:ds="http://schemas.openxmlformats.org/officeDocument/2006/customXml" ds:itemID="{E17CF73B-06D3-4F9B-955D-0740B08863BD}">
   <ds:schemaRefs>
     <ds:schemaRef ds:uri="http://schemas.microsoft.com/office/2006/metadata/properties"/>
     <ds:schemaRef ds:uri="http://schemas.microsoft.com/office/infopath/2007/PartnerControls"/>
     <ds:schemaRef ds:uri="c0caafef-fd22-48d0-85dc-526f5aa604f6"/>
     <ds:schemaRef ds:uri="cc7ce8ca-8f52-44ec-9496-3c41d0f5ad18"/>
+  </ds:schemaRefs>
+</ds:datastoreItem>
+</file>
+
+<file path=customXml/itemProps2.xml><?xml version="1.0" encoding="utf-8"?>
+<ds:datastoreItem xmlns:ds="http://schemas.openxmlformats.org/officeDocument/2006/customXml" ds:itemID="{3A3DF9AB-00FC-46DB-A5D6-293E8DE99346}">
+  <ds:schemaRefs>
+    <ds:schemaRef ds:uri="http://schemas.microsoft.com/sharepoint/v3/contenttype/forms"/>
   </ds:schemaRefs>
 </ds:datastoreItem>
 </file>
